--- a/images/hal_image.pptx
+++ b/images/hal_image.pptx
@@ -272,7 +272,7 @@
           <a:p>
             <a:fld id="{8F4D3B3F-908F-4151-9F50-5D7AEE049C49}" type="datetimeFigureOut">
               <a:rPr lang="fr-CH" smtClean="0"/>
-              <a:t>03.10.2026</a:t>
+              <a:t>04.10.2026</a:t>
             </a:fld>
             <a:endParaRPr lang="fr-CH"/>
           </a:p>
@@ -472,7 +472,7 @@
           <a:p>
             <a:fld id="{8F4D3B3F-908F-4151-9F50-5D7AEE049C49}" type="datetimeFigureOut">
               <a:rPr lang="fr-CH" smtClean="0"/>
-              <a:t>03.10.2026</a:t>
+              <a:t>04.10.2026</a:t>
             </a:fld>
             <a:endParaRPr lang="fr-CH"/>
           </a:p>
@@ -682,7 +682,7 @@
           <a:p>
             <a:fld id="{8F4D3B3F-908F-4151-9F50-5D7AEE049C49}" type="datetimeFigureOut">
               <a:rPr lang="fr-CH" smtClean="0"/>
-              <a:t>03.10.2026</a:t>
+              <a:t>04.10.2026</a:t>
             </a:fld>
             <a:endParaRPr lang="fr-CH"/>
           </a:p>
@@ -882,7 +882,7 @@
           <a:p>
             <a:fld id="{8F4D3B3F-908F-4151-9F50-5D7AEE049C49}" type="datetimeFigureOut">
               <a:rPr lang="fr-CH" smtClean="0"/>
-              <a:t>03.10.2026</a:t>
+              <a:t>04.10.2026</a:t>
             </a:fld>
             <a:endParaRPr lang="fr-CH"/>
           </a:p>
@@ -1158,7 +1158,7 @@
           <a:p>
             <a:fld id="{8F4D3B3F-908F-4151-9F50-5D7AEE049C49}" type="datetimeFigureOut">
               <a:rPr lang="fr-CH" smtClean="0"/>
-              <a:t>03.10.2026</a:t>
+              <a:t>04.10.2026</a:t>
             </a:fld>
             <a:endParaRPr lang="fr-CH"/>
           </a:p>
@@ -1426,7 +1426,7 @@
           <a:p>
             <a:fld id="{8F4D3B3F-908F-4151-9F50-5D7AEE049C49}" type="datetimeFigureOut">
               <a:rPr lang="fr-CH" smtClean="0"/>
-              <a:t>03.10.2026</a:t>
+              <a:t>04.10.2026</a:t>
             </a:fld>
             <a:endParaRPr lang="fr-CH"/>
           </a:p>
@@ -1841,7 +1841,7 @@
           <a:p>
             <a:fld id="{8F4D3B3F-908F-4151-9F50-5D7AEE049C49}" type="datetimeFigureOut">
               <a:rPr lang="fr-CH" smtClean="0"/>
-              <a:t>03.10.2026</a:t>
+              <a:t>04.10.2026</a:t>
             </a:fld>
             <a:endParaRPr lang="fr-CH"/>
           </a:p>
@@ -1983,7 +1983,7 @@
           <a:p>
             <a:fld id="{8F4D3B3F-908F-4151-9F50-5D7AEE049C49}" type="datetimeFigureOut">
               <a:rPr lang="fr-CH" smtClean="0"/>
-              <a:t>03.10.2026</a:t>
+              <a:t>04.10.2026</a:t>
             </a:fld>
             <a:endParaRPr lang="fr-CH"/>
           </a:p>
@@ -2096,7 +2096,7 @@
           <a:p>
             <a:fld id="{8F4D3B3F-908F-4151-9F50-5D7AEE049C49}" type="datetimeFigureOut">
               <a:rPr lang="fr-CH" smtClean="0"/>
-              <a:t>03.10.2026</a:t>
+              <a:t>04.10.2026</a:t>
             </a:fld>
             <a:endParaRPr lang="fr-CH"/>
           </a:p>
@@ -2461,7 +2461,7 @@
           <a:p>
             <a:fld id="{8F4D3B3F-908F-4151-9F50-5D7AEE049C49}" type="datetimeFigureOut">
               <a:rPr lang="fr-CH" smtClean="0"/>
-              <a:t>03.10.2026</a:t>
+              <a:t>04.10.2026</a:t>
             </a:fld>
             <a:endParaRPr lang="fr-CH"/>
           </a:p>
@@ -2750,7 +2750,7 @@
           <a:p>
             <a:fld id="{8F4D3B3F-908F-4151-9F50-5D7AEE049C49}" type="datetimeFigureOut">
               <a:rPr lang="fr-CH" smtClean="0"/>
-              <a:t>03.10.2026</a:t>
+              <a:t>04.10.2026</a:t>
             </a:fld>
             <a:endParaRPr lang="fr-CH"/>
           </a:p>
@@ -2993,7 +2993,7 @@
           <a:p>
             <a:fld id="{8F4D3B3F-908F-4151-9F50-5D7AEE049C49}" type="datetimeFigureOut">
               <a:rPr lang="fr-CH" smtClean="0"/>
-              <a:t>03.10.2026</a:t>
+              <a:t>04.10.2026</a:t>
             </a:fld>
             <a:endParaRPr lang="fr-CH"/>
           </a:p>
@@ -3900,6 +3900,274 @@
           </a:p>
         </p:txBody>
       </p:sp>
+      <p:sp>
+        <p:nvSpPr>
+          <p:cNvPr id="3" name="Rectangle 2">
+            <a:extLst>
+              <a:ext uri="{FF2B5EF4-FFF2-40B4-BE49-F238E27FC236}">
+                <a16:creationId xmlns:a16="http://schemas.microsoft.com/office/drawing/2014/main" id="{D7F9C404-E97B-7D33-CCCF-80B0B478DB3B}"/>
+              </a:ext>
+            </a:extLst>
+          </p:cNvPr>
+          <p:cNvSpPr/>
+          <p:nvPr/>
+        </p:nvSpPr>
+        <p:spPr>
+          <a:xfrm>
+            <a:off x="337559" y="1649338"/>
+            <a:ext cx="2867114" cy="1063952"/>
+          </a:xfrm>
+          <a:prstGeom prst="rect">
+            <a:avLst/>
+          </a:prstGeom>
+          <a:solidFill>
+            <a:srgbClr val="FF0000"/>
+          </a:solidFill>
+          <a:ln>
+            <a:solidFill>
+              <a:schemeClr val="bg1"/>
+            </a:solidFill>
+          </a:ln>
+        </p:spPr>
+        <p:style>
+          <a:lnRef idx="2">
+            <a:schemeClr val="accent1">
+              <a:shade val="15000"/>
+            </a:schemeClr>
+          </a:lnRef>
+          <a:fillRef idx="1">
+            <a:schemeClr val="accent1"/>
+          </a:fillRef>
+          <a:effectRef idx="0">
+            <a:schemeClr val="accent1"/>
+          </a:effectRef>
+          <a:fontRef idx="minor">
+            <a:schemeClr val="lt1"/>
+          </a:fontRef>
+        </p:style>
+        <p:txBody>
+          <a:bodyPr rtlCol="0" anchor="ctr"/>
+          <a:lstStyle/>
+          <a:p>
+            <a:pPr algn="ctr"/>
+            <a:r>
+              <a:rPr lang="fr-CH" sz="2000" b="1" dirty="0">
+                <a:effectLst>
+                  <a:glow rad="101600">
+                    <a:srgbClr val="FFC000">
+                      <a:alpha val="60000"/>
+                    </a:srgbClr>
+                  </a:glow>
+                </a:effectLst>
+                <a:latin typeface="Courier New" panose="02070309020205020404" pitchFamily="49" charset="0"/>
+                <a:cs typeface="Courier New" panose="02070309020205020404" pitchFamily="49" charset="0"/>
+              </a:rPr>
+              <a:t>The page </a:t>
+            </a:r>
+            <a:r>
+              <a:rPr lang="fr-CH" sz="2000" b="1" dirty="0" err="1">
+                <a:effectLst>
+                  <a:glow rad="101600">
+                    <a:srgbClr val="FFC000">
+                      <a:alpha val="60000"/>
+                    </a:srgbClr>
+                  </a:glow>
+                </a:effectLst>
+                <a:latin typeface="Courier New" panose="02070309020205020404" pitchFamily="49" charset="0"/>
+                <a:cs typeface="Courier New" panose="02070309020205020404" pitchFamily="49" charset="0"/>
+              </a:rPr>
+              <a:t>you’re</a:t>
+            </a:r>
+            <a:r>
+              <a:rPr lang="fr-CH" sz="2000" b="1" dirty="0">
+                <a:effectLst>
+                  <a:glow rad="101600">
+                    <a:srgbClr val="FFC000">
+                      <a:alpha val="60000"/>
+                    </a:srgbClr>
+                  </a:glow>
+                </a:effectLst>
+                <a:latin typeface="Courier New" panose="02070309020205020404" pitchFamily="49" charset="0"/>
+                <a:cs typeface="Courier New" panose="02070309020205020404" pitchFamily="49" charset="0"/>
+              </a:rPr>
+              <a:t> </a:t>
+            </a:r>
+            <a:r>
+              <a:rPr lang="fr-CH" sz="2000" b="1" dirty="0" err="1">
+                <a:effectLst>
+                  <a:glow rad="101600">
+                    <a:srgbClr val="FFC000">
+                      <a:alpha val="60000"/>
+                    </a:srgbClr>
+                  </a:glow>
+                </a:effectLst>
+                <a:latin typeface="Courier New" panose="02070309020205020404" pitchFamily="49" charset="0"/>
+                <a:cs typeface="Courier New" panose="02070309020205020404" pitchFamily="49" charset="0"/>
+              </a:rPr>
+              <a:t>looking</a:t>
+            </a:r>
+            <a:r>
+              <a:rPr lang="fr-CH" sz="2000" b="1" dirty="0">
+                <a:effectLst>
+                  <a:glow rad="101600">
+                    <a:srgbClr val="FFC000">
+                      <a:alpha val="60000"/>
+                    </a:srgbClr>
+                  </a:glow>
+                </a:effectLst>
+                <a:latin typeface="Courier New" panose="02070309020205020404" pitchFamily="49" charset="0"/>
+                <a:cs typeface="Courier New" panose="02070309020205020404" pitchFamily="49" charset="0"/>
+              </a:rPr>
+              <a:t> for </a:t>
+            </a:r>
+            <a:r>
+              <a:rPr lang="fr-CH" sz="2000" b="1" dirty="0" err="1">
+                <a:effectLst>
+                  <a:glow rad="101600">
+                    <a:srgbClr val="FFC000">
+                      <a:alpha val="60000"/>
+                    </a:srgbClr>
+                  </a:glow>
+                </a:effectLst>
+                <a:latin typeface="Courier New" panose="02070309020205020404" pitchFamily="49" charset="0"/>
+                <a:cs typeface="Courier New" panose="02070309020205020404" pitchFamily="49" charset="0"/>
+              </a:rPr>
+              <a:t>can’t</a:t>
+            </a:r>
+            <a:r>
+              <a:rPr lang="fr-CH" sz="2000" b="1" dirty="0">
+                <a:effectLst>
+                  <a:glow rad="101600">
+                    <a:srgbClr val="FFC000">
+                      <a:alpha val="60000"/>
+                    </a:srgbClr>
+                  </a:glow>
+                </a:effectLst>
+                <a:latin typeface="Courier New" panose="02070309020205020404" pitchFamily="49" charset="0"/>
+                <a:cs typeface="Courier New" panose="02070309020205020404" pitchFamily="49" charset="0"/>
+              </a:rPr>
+              <a:t> </a:t>
+            </a:r>
+            <a:r>
+              <a:rPr lang="fr-CH" sz="2000" b="1" dirty="0" err="1">
+                <a:effectLst>
+                  <a:glow rad="101600">
+                    <a:srgbClr val="FFC000">
+                      <a:alpha val="60000"/>
+                    </a:srgbClr>
+                  </a:glow>
+                </a:effectLst>
+                <a:latin typeface="Courier New" panose="02070309020205020404" pitchFamily="49" charset="0"/>
+                <a:cs typeface="Courier New" panose="02070309020205020404" pitchFamily="49" charset="0"/>
+              </a:rPr>
+              <a:t>be</a:t>
+            </a:r>
+            <a:r>
+              <a:rPr lang="fr-CH" sz="2000" b="1" dirty="0">
+                <a:effectLst>
+                  <a:glow rad="101600">
+                    <a:srgbClr val="FFC000">
+                      <a:alpha val="60000"/>
+                    </a:srgbClr>
+                  </a:glow>
+                </a:effectLst>
+                <a:latin typeface="Courier New" panose="02070309020205020404" pitchFamily="49" charset="0"/>
+                <a:cs typeface="Courier New" panose="02070309020205020404" pitchFamily="49" charset="0"/>
+              </a:rPr>
+              <a:t> </a:t>
+            </a:r>
+            <a:r>
+              <a:rPr lang="fr-CH" sz="2000" b="1" dirty="0" err="1">
+                <a:effectLst>
+                  <a:glow rad="101600">
+                    <a:srgbClr val="FFC000">
+                      <a:alpha val="60000"/>
+                    </a:srgbClr>
+                  </a:glow>
+                </a:effectLst>
+                <a:latin typeface="Courier New" panose="02070309020205020404" pitchFamily="49" charset="0"/>
+                <a:cs typeface="Courier New" panose="02070309020205020404" pitchFamily="49" charset="0"/>
+              </a:rPr>
+              <a:t>found</a:t>
+            </a:r>
+            <a:endParaRPr lang="fr-CH" sz="2000" b="1" dirty="0">
+              <a:effectLst>
+                <a:glow rad="101600">
+                  <a:srgbClr val="FFC000">
+                    <a:alpha val="60000"/>
+                  </a:srgbClr>
+                </a:glow>
+              </a:effectLst>
+              <a:latin typeface="Courier New" panose="02070309020205020404" pitchFamily="49" charset="0"/>
+              <a:cs typeface="Courier New" panose="02070309020205020404" pitchFamily="49" charset="0"/>
+            </a:endParaRPr>
+          </a:p>
+        </p:txBody>
+      </p:sp>
+      <p:sp>
+        <p:nvSpPr>
+          <p:cNvPr id="7" name="Rectangle 6">
+            <a:extLst>
+              <a:ext uri="{FF2B5EF4-FFF2-40B4-BE49-F238E27FC236}">
+                <a16:creationId xmlns:a16="http://schemas.microsoft.com/office/drawing/2014/main" id="{367CA72B-4C21-7304-BC5B-BD2289B18B72}"/>
+              </a:ext>
+            </a:extLst>
+          </p:cNvPr>
+          <p:cNvSpPr/>
+          <p:nvPr/>
+        </p:nvSpPr>
+        <p:spPr>
+          <a:xfrm>
+            <a:off x="337559" y="2829888"/>
+            <a:ext cx="2867114" cy="1063952"/>
+          </a:xfrm>
+          <a:prstGeom prst="rect">
+            <a:avLst/>
+          </a:prstGeom>
+          <a:solidFill>
+            <a:srgbClr val="FF0000"/>
+          </a:solidFill>
+          <a:ln>
+            <a:solidFill>
+              <a:schemeClr val="bg1"/>
+            </a:solidFill>
+          </a:ln>
+        </p:spPr>
+        <p:style>
+          <a:lnRef idx="2">
+            <a:schemeClr val="accent1">
+              <a:shade val="15000"/>
+            </a:schemeClr>
+          </a:lnRef>
+          <a:fillRef idx="1">
+            <a:schemeClr val="accent1"/>
+          </a:fillRef>
+          <a:effectRef idx="0">
+            <a:schemeClr val="accent1"/>
+          </a:effectRef>
+          <a:fontRef idx="minor">
+            <a:schemeClr val="lt1"/>
+          </a:fontRef>
+        </p:style>
+        <p:txBody>
+          <a:bodyPr rtlCol="0" anchor="ctr"/>
+          <a:lstStyle/>
+          <a:p>
+            <a:pPr algn="ctr"/>
+            <a:endParaRPr lang="fr-CH" sz="2000" b="1" dirty="0">
+              <a:effectLst>
+                <a:glow rad="101600">
+                  <a:srgbClr val="FFC000">
+                    <a:alpha val="60000"/>
+                  </a:srgbClr>
+                </a:glow>
+              </a:effectLst>
+              <a:latin typeface="Courier New" panose="02070309020205020404" pitchFamily="49" charset="0"/>
+              <a:cs typeface="Courier New" panose="02070309020205020404" pitchFamily="49" charset="0"/>
+            </a:endParaRPr>
+          </a:p>
+        </p:txBody>
+      </p:sp>
     </p:spTree>
     <p:extLst>
       <p:ext uri="{BB962C8B-B14F-4D97-AF65-F5344CB8AC3E}">
